--- a/docs/apresentacao_embeddings.pptx
+++ b/docs/apresentacao_embeddings.pptx
@@ -3154,7 +3154,7 @@
               </a:defRPr>
             </a:pPr>
             <a:r>
-              <a:t>Autor: João Vitor Rura  |  Trabalho de Conclusão de Curso (TCC)</a:t>
+              <a:t>Autor: João Vitor Rura  |  Projeto de Pesquisa Científica e Tecnológica (ICT)</a:t>
             </a:r>
             <a:br/>
             <a:r>

--- a/docs/apresentacao_embeddings.pptx
+++ b/docs/apresentacao_embeddings.pptx
@@ -3154,7 +3154,7 @@
               </a:defRPr>
             </a:pPr>
             <a:r>
-              <a:t>Autor: João Vitor Rura  |  Projeto de Pesquisa Científica e Tecnológica (ICT)</a:t>
+              <a:t>Autor: João Messias Lima Pereira  |  Projeto de Pesquisa Científica e Tecnológica (ICT)</a:t>
             </a:r>
             <a:br/>
             <a:r>
